--- a/dist/초1/기술·가정/만들기/초1_기술·가정_만들기_01_안전한재료로만들기_학생용.pptx
+++ b/dist/초1/기술·가정/만들기/초1_기술·가정_만들기_01_안전한재료로만들기_학생용.pptx
@@ -114,34 +114,34 @@
   <p:extLst>
     <p:ext uri="{521415D9-36F7-43E2-AB2F-B90AF26B5E84}">
       <p14:sectionLst xmlns:p14="http://schemas.microsoft.com/office/powerpoint/2010/main">
-        <p14:section name="도입" id="{efacaa57-2c85-b0cd-74b6-c06d87d7a0a2}">
+        <p14:section name="도입" id="{b714eda7-05ac-2616-e69c-76971a80bbe1}">
           <p14:sldIdLst>
             <p14:sldId id="256"/>
             <p14:sldId id="257"/>
           </p14:sldIdLst>
         </p14:section>
-        <p14:section name="개념" id="{6390767d-4fe9-b046-436a-354db779a66f}">
+        <p14:section name="개념" id="{2cb479c2-5e19-d4ad-8fe4-a491ca986315}">
           <p14:sldIdLst>
             <p14:sldId id="258"/>
           </p14:sldIdLst>
         </p14:section>
-        <p14:section name="연습" id="{517d13c5-ba71-87d1-b209-0de45af6eb3a}">
+        <p14:section name="연습" id="{c10d06bc-10a6-2805-319f-41408c039af7}">
           <p14:sldIdLst>
             <p14:sldId id="259"/>
             <p14:sldId id="260"/>
           </p14:sldIdLst>
         </p14:section>
-        <p14:section name="확인" id="{74a26f1a-d2a0-3664-65cf-ce89df74bb9d}">
+        <p14:section name="확인" id="{4b8f34ea-415d-ecd3-cd2b-d58a0a27589e}">
           <p14:sldIdLst>
             <p14:sldId id="261"/>
           </p14:sldIdLst>
         </p14:section>
-        <p14:section name="정리" id="{5f52bf17-fd2b-96c6-d1c4-c4a350a6b9f1}">
+        <p14:section name="정리" id="{a03604c1-c4dd-d1b1-b8c7-901e292ca836}">
           <p14:sldIdLst>
             <p14:sldId id="262"/>
           </p14:sldIdLst>
         </p14:section>
-        <p14:section name="보충" id="{28a11c46-84c4-3512-a12d-8c401180ebc7}">
+        <p14:section name="보충" id="{fde27fe8-5e47-92fb-6875-8a96de4036e6}">
           <p14:sldIdLst>
             <p14:sldId id="263"/>
           </p14:sldIdLst>
